--- a/skills/presentation-template-library/skills/artifact-template-tidal-research/assets/reference.pptx
+++ b/skills/presentation-template-library/skills/artifact-template-tidal-research/assets/reference.pptx
@@ -2296,7 +2296,7 @@
         </p:xfrm>
         <a:graphic xmlns:a="http://schemas.openxmlformats.org/drawingml/2006/main">
           <a:graphicData uri="http://schemas.openxmlformats.org/drawingml/2006/chart">
-            <c:chart xmlns:r="http://schemas.openxmlformats.org/officeDocument/2006/relationships" xmlns:c="http://schemas.openxmlformats.org/drawingml/2006/chart" r:id="R5a949b2f987c45bf"/>
+            <c:chart xmlns:r="http://schemas.openxmlformats.org/officeDocument/2006/relationships" xmlns:c="http://schemas.openxmlformats.org/drawingml/2006/chart" r:id="Rd5dabe1dc5c94aa9"/>
           </a:graphicData>
         </a:graphic>
       </p:graphicFrame>

--- a/skills/presentation-template-library/skills/artifact-template-tidal-research/assets/reference.pptx
+++ b/skills/presentation-template-library/skills/artifact-template-tidal-research/assets/reference.pptx
@@ -2296,7 +2296,7 @@
         </p:xfrm>
         <a:graphic xmlns:a="http://schemas.openxmlformats.org/drawingml/2006/main">
           <a:graphicData uri="http://schemas.openxmlformats.org/drawingml/2006/chart">
-            <c:chart xmlns:r="http://schemas.openxmlformats.org/officeDocument/2006/relationships" xmlns:c="http://schemas.openxmlformats.org/drawingml/2006/chart" r:id="Rd5dabe1dc5c94aa9"/>
+            <c:chart xmlns:r="http://schemas.openxmlformats.org/officeDocument/2006/relationships" xmlns:c="http://schemas.openxmlformats.org/drawingml/2006/chart" r:id="R4ec3d94fcfd74872"/>
           </a:graphicData>
         </a:graphic>
       </p:graphicFrame>

--- a/skills/presentation-template-library/skills/artifact-template-tidal-research/assets/reference.pptx
+++ b/skills/presentation-template-library/skills/artifact-template-tidal-research/assets/reference.pptx
@@ -2296,7 +2296,7 @@
         </p:xfrm>
         <a:graphic xmlns:a="http://schemas.openxmlformats.org/drawingml/2006/main">
           <a:graphicData uri="http://schemas.openxmlformats.org/drawingml/2006/chart">
-            <c:chart xmlns:r="http://schemas.openxmlformats.org/officeDocument/2006/relationships" xmlns:c="http://schemas.openxmlformats.org/drawingml/2006/chart" r:id="R4ec3d94fcfd74872"/>
+            <c:chart xmlns:r="http://schemas.openxmlformats.org/officeDocument/2006/relationships" xmlns:c="http://schemas.openxmlformats.org/drawingml/2006/chart" r:id="R5700f887e2e74549"/>
           </a:graphicData>
         </a:graphic>
       </p:graphicFrame>

--- a/skills/presentation-template-library/skills/artifact-template-tidal-research/assets/reference.pptx
+++ b/skills/presentation-template-library/skills/artifact-template-tidal-research/assets/reference.pptx
@@ -194,182 +194,6 @@
 </a:theme>
 </file>
 
-<file path=ppt/slides/charts/chart1.xml><?xml version="1.0" encoding="utf-8"?>
-<c:chartSpace xmlns:c="http://schemas.openxmlformats.org/drawingml/2006/chart" xmlns:a="http://schemas.openxmlformats.org/drawingml/2006/main">
-  <c:chart>
-    <c:title>
-      <c:tx>
-        <c:rich>
-          <a:bodyPr/>
-          <a:lstStyle/>
-          <a:p>
-            <a:r>
-              <a:t>Observed signal over the study window</a:t>
-            </a:r>
-          </a:p>
-        </c:rich>
-      </c:tx>
-      <c:layout/>
-    </c:title>
-    <c:plotArea>
-      <c:layout/>
-      <c:lineChart>
-        <c:grouping val="standard"/>
-        <c:ser>
-          <c:idx val="0"/>
-          <c:order val="0"/>
-          <c:tx>
-            <c:v>Primary</c:v>
-          </c:tx>
-          <c:spPr>
-            <a:solidFill>
-              <a:srgbClr val="188A78"/>
-            </a:solidFill>
-            <a:ln w="50800">
-              <a:solidFill>
-                <a:srgbClr val="188A78"/>
-              </a:solidFill>
-              <a:prstDash val="solid"/>
-            </a:ln>
-          </c:spPr>
-          <c:marker>
-            <c:symbol val="circle"/>
-            <c:size val="8"/>
-          </c:marker>
-          <c:cat>
-            <c:strLit>
-              <c:ptCount val="5"/>
-              <c:pt idx="0">
-                <c:v>Baseline</c:v>
-              </c:pt>
-              <c:pt idx="1">
-                <c:v>Phase 1</c:v>
-              </c:pt>
-              <c:pt idx="2">
-                <c:v>Phase 2</c:v>
-              </c:pt>
-              <c:pt idx="3">
-                <c:v>Phase 3</c:v>
-              </c:pt>
-              <c:pt idx="4">
-                <c:v>Close</c:v>
-              </c:pt>
-            </c:strLit>
-          </c:cat>
-          <c:val>
-            <c:numLit>
-              <c:formatCode>General</c:formatCode>
-              <c:ptCount val="5"/>
-              <c:pt idx="0">
-                <c:v>42</c:v>
-              </c:pt>
-              <c:pt idx="1">
-                <c:v>48</c:v>
-              </c:pt>
-              <c:pt idx="2">
-                <c:v>54</c:v>
-              </c:pt>
-              <c:pt idx="3">
-                <c:v>61</c:v>
-              </c:pt>
-              <c:pt idx="4">
-                <c:v>68</c:v>
-              </c:pt>
-            </c:numLit>
-          </c:val>
-        </c:ser>
-        <c:ser>
-          <c:idx val="1"/>
-          <c:order val="1"/>
-          <c:tx>
-            <c:v>Reference</c:v>
-          </c:tx>
-          <c:spPr>
-            <a:solidFill>
-              <a:srgbClr val="8E9C99"/>
-            </a:solidFill>
-            <a:ln w="38100">
-              <a:solidFill>
-                <a:srgbClr val="8E9C99"/>
-              </a:solidFill>
-              <a:prstDash val="solid"/>
-            </a:ln>
-          </c:spPr>
-          <c:marker>
-            <c:symbol val="circle"/>
-            <c:size val="7"/>
-          </c:marker>
-          <c:cat>
-            <c:strLit>
-              <c:ptCount val="5"/>
-              <c:pt idx="0">
-                <c:v>Baseline</c:v>
-              </c:pt>
-              <c:pt idx="1">
-                <c:v>Phase 1</c:v>
-              </c:pt>
-              <c:pt idx="2">
-                <c:v>Phase 2</c:v>
-              </c:pt>
-              <c:pt idx="3">
-                <c:v>Phase 3</c:v>
-              </c:pt>
-              <c:pt idx="4">
-                <c:v>Close</c:v>
-              </c:pt>
-            </c:strLit>
-          </c:cat>
-          <c:val>
-            <c:numLit>
-              <c:formatCode>General</c:formatCode>
-              <c:ptCount val="5"/>
-              <c:pt idx="0">
-                <c:v>40</c:v>
-              </c:pt>
-              <c:pt idx="1">
-                <c:v>42</c:v>
-              </c:pt>
-              <c:pt idx="2">
-                <c:v>44</c:v>
-              </c:pt>
-              <c:pt idx="3">
-                <c:v>45</c:v>
-              </c:pt>
-              <c:pt idx="4">
-                <c:v>46</c:v>
-              </c:pt>
-            </c:numLit>
-          </c:val>
-        </c:ser>
-        <c:axId val="1"/>
-        <c:axId val="2"/>
-      </c:lineChart>
-      <c:catAx>
-        <c:axId val="1"/>
-        <c:scaling>
-          <c:orientation val="minMax"/>
-        </c:scaling>
-        <c:axPos val="b"/>
-        <c:crossAx val="2"/>
-      </c:catAx>
-      <c:valAx>
-        <c:axId val="2"/>
-        <c:scaling>
-          <c:orientation val="minMax"/>
-        </c:scaling>
-        <c:axPos val="l"/>
-        <c:crossAx val="1"/>
-      </c:valAx>
-    </c:plotArea>
-    <c:legend>
-      <c:legendPos val="r"/>
-      <c:layout/>
-    </c:legend>
-    <c:plotVisOnly val="1"/>
-  </c:chart>
-</c:chartSpace>
-</file>
-
 <file path=ppt/slides/slide1.xml><?xml version="1.0" encoding="utf-8"?>
 <p:sld xmlns:p="http://schemas.openxmlformats.org/presentationml/2006/main">
   <p:cSld name="Opening claim">
@@ -2282,114 +2106,59 @@
           </a:p>
         </p:txBody>
       </p:sp>
-      <p:graphicFrame>
-        <p:nvGraphicFramePr>
-          <p:cNvPr id="8" name="evidence-chart"/>
-          <p:cNvGraphicFramePr>
-            <a:graphicFrameLocks xmlns:a="http://schemas.openxmlformats.org/drawingml/2006/main" noGrp="1"/>
-          </p:cNvGraphicFramePr>
-          <p:nvPr/>
-        </p:nvGraphicFramePr>
-        <p:xfrm>
-          <a:off xmlns:a="http://schemas.openxmlformats.org/drawingml/2006/main" x="1047750" y="3048000"/>
-          <a:ext xmlns:a="http://schemas.openxmlformats.org/drawingml/2006/main" cx="7905750" cy="3000375"/>
-        </p:xfrm>
-        <a:graphic xmlns:a="http://schemas.openxmlformats.org/drawingml/2006/main">
-          <a:graphicData uri="http://schemas.openxmlformats.org/drawingml/2006/chart">
-            <c:chart xmlns:r="http://schemas.openxmlformats.org/officeDocument/2006/relationships" xmlns:c="http://schemas.openxmlformats.org/drawingml/2006/chart" r:id="R5700f887e2e74549"/>
-          </a:graphicData>
-        </a:graphic>
-      </p:graphicFrame>
-      <p:sp>
-        <p:nvSpPr>
-          <p:cNvPr id="9" name="metric"/>
-          <p:cNvSpPr txBox="1"/>
-          <p:nvPr/>
-        </p:nvSpPr>
-        <p:spPr>
-          <a:xfrm xmlns:a="http://schemas.openxmlformats.org/drawingml/2006/main">
-            <a:off x="9906000" y="3333750"/>
-            <a:ext cx="2667000" cy="781050"/>
-          </a:xfrm>
-          <a:prstGeom xmlns:a="http://schemas.openxmlformats.org/drawingml/2006/main" prst="rect">
-            <a:avLst/>
-          </a:prstGeom>
-          <a:noFill xmlns:a="http://schemas.openxmlformats.org/drawingml/2006/main"/>
-          <a:ln xmlns:a="http://schemas.openxmlformats.org/drawingml/2006/main" w="0">
-            <a:noFill/>
-          </a:ln>
-        </p:spPr>
-        <p:txBody>
-          <a:bodyPr xmlns:a="http://schemas.openxmlformats.org/drawingml/2006/main" wrap="square" lIns="0" tIns="0" rIns="0" bIns="0" anchor="t"/>
-          <a:lstStyle xmlns:a="http://schemas.openxmlformats.org/drawingml/2006/main"/>
-          <a:p xmlns:a="http://schemas.openxmlformats.org/drawingml/2006/main">
-            <a:r>
-              <a:rPr lang="en-US" sz="4800" b="1">
+      <p:sp>
+        <p:nvSpPr>
+          <p:cNvPr id="8" name="timeline-label"/>
+          <p:cNvSpPr txBox="1"/>
+          <p:nvPr/>
+        </p:nvSpPr>
+        <p:spPr>
+          <a:xfrm xmlns:a="http://schemas.openxmlformats.org/drawingml/2006/main">
+            <a:off x="1066800" y="3238500"/>
+            <a:ext cx="4000500" cy="228600"/>
+          </a:xfrm>
+          <a:prstGeom xmlns:a="http://schemas.openxmlformats.org/drawingml/2006/main" prst="rect">
+            <a:avLst/>
+          </a:prstGeom>
+          <a:noFill xmlns:a="http://schemas.openxmlformats.org/drawingml/2006/main"/>
+          <a:ln xmlns:a="http://schemas.openxmlformats.org/drawingml/2006/main" w="0">
+            <a:noFill/>
+          </a:ln>
+        </p:spPr>
+        <p:txBody>
+          <a:bodyPr xmlns:a="http://schemas.openxmlformats.org/drawingml/2006/main" wrap="square" lIns="0" tIns="0" rIns="0" bIns="0" anchor="t"/>
+          <a:lstStyle xmlns:a="http://schemas.openxmlformats.org/drawingml/2006/main"/>
+          <a:p xmlns:a="http://schemas.openxmlformats.org/drawingml/2006/main">
+            <a:r>
+              <a:rPr lang="en-US" sz="1125" b="1">
                 <a:solidFill>
                   <a:srgbClr val="188A78"/>
                 </a:solidFill>
                 <a:latin typeface="Inter"/>
                 <a:ea typeface="Inter"/>
               </a:rPr>
-              <a:t>68</a:t>
-            </a:r>
-            <a:endParaRPr lang="en-US"/>
-          </a:p>
-        </p:txBody>
-      </p:sp>
-      <p:sp>
-        <p:nvSpPr>
-          <p:cNvPr id="10" name="metric-label"/>
-          <p:cNvSpPr txBox="1"/>
-          <p:nvPr/>
-        </p:nvSpPr>
-        <p:spPr>
-          <a:xfrm xmlns:a="http://schemas.openxmlformats.org/drawingml/2006/main">
-            <a:off x="9906000" y="4143375"/>
-            <a:ext cx="3143250" cy="285750"/>
-          </a:xfrm>
-          <a:prstGeom xmlns:a="http://schemas.openxmlformats.org/drawingml/2006/main" prst="rect">
-            <a:avLst/>
-          </a:prstGeom>
-          <a:noFill xmlns:a="http://schemas.openxmlformats.org/drawingml/2006/main"/>
-          <a:ln xmlns:a="http://schemas.openxmlformats.org/drawingml/2006/main" w="0">
-            <a:noFill/>
-          </a:ln>
-        </p:spPr>
-        <p:txBody>
-          <a:bodyPr xmlns:a="http://schemas.openxmlformats.org/drawingml/2006/main" wrap="square" lIns="0" tIns="0" rIns="0" bIns="0" anchor="t"/>
-          <a:lstStyle xmlns:a="http://schemas.openxmlformats.org/drawingml/2006/main"/>
-          <a:p xmlns:a="http://schemas.openxmlformats.org/drawingml/2006/main">
-            <a:r>
-              <a:rPr lang="en-US" sz="1350">
-                <a:solidFill>
-                  <a:srgbClr val="8E9C99"/>
-                </a:solidFill>
-                <a:latin typeface="Inter"/>
-                <a:ea typeface="Inter"/>
-              </a:rPr>
-              <a:t>participation index · week 4</a:t>
-            </a:r>
-            <a:endParaRPr lang="en-US"/>
-          </a:p>
-        </p:txBody>
-      </p:sp>
-      <p:sp>
-        <p:nvSpPr>
-          <p:cNvPr id="11" name="rail-rule"/>
+              <a:t>EVOLUTION / TRANSITION</a:t>
+            </a:r>
+            <a:endParaRPr lang="en-US"/>
+          </a:p>
+        </p:txBody>
+      </p:sp>
+      <p:sp>
+        <p:nvSpPr>
+          <p:cNvPr id="9" name="timeline-axis"/>
           <p:cNvSpPr/>
           <p:nvPr/>
         </p:nvSpPr>
         <p:spPr>
           <a:xfrm xmlns:a="http://schemas.openxmlformats.org/drawingml/2006/main">
-            <a:off x="9906000" y="4810125"/>
-            <a:ext cx="3762375" cy="0"/>
+            <a:off x="1219200" y="4762500"/>
+            <a:ext cx="10287000" cy="0"/>
           </a:xfrm>
           <a:prstGeom xmlns:a="http://schemas.openxmlformats.org/drawingml/2006/main" prst="line">
             <a:avLst/>
           </a:prstGeom>
           <a:noFill xmlns:a="http://schemas.openxmlformats.org/drawingml/2006/main"/>
-          <a:ln xmlns:a="http://schemas.openxmlformats.org/drawingml/2006/main" w="25400">
+          <a:ln xmlns:a="http://schemas.openxmlformats.org/drawingml/2006/main" w="38100">
             <a:solidFill>
               <a:srgbClr val="8E9C99"/>
             </a:solidFill>
@@ -2410,44 +2179,831 @@
       </p:sp>
       <p:sp>
         <p:nvSpPr>
-          <p:cNvPr id="12" name="read-through"/>
-          <p:cNvSpPr txBox="1"/>
-          <p:nvPr/>
-        </p:nvSpPr>
-        <p:spPr>
-          <a:xfrm xmlns:a="http://schemas.openxmlformats.org/drawingml/2006/main">
-            <a:off x="9906000" y="5143500"/>
-            <a:ext cx="3429000" cy="742950"/>
-          </a:xfrm>
-          <a:prstGeom xmlns:a="http://schemas.openxmlformats.org/drawingml/2006/main" prst="rect">
-            <a:avLst/>
-          </a:prstGeom>
-          <a:noFill xmlns:a="http://schemas.openxmlformats.org/drawingml/2006/main"/>
-          <a:ln xmlns:a="http://schemas.openxmlformats.org/drawingml/2006/main" w="0">
-            <a:noFill/>
-          </a:ln>
-        </p:spPr>
-        <p:txBody>
-          <a:bodyPr xmlns:a="http://schemas.openxmlformats.org/drawingml/2006/main" wrap="square" lIns="0" tIns="0" rIns="0" bIns="0" anchor="t"/>
-          <a:lstStyle xmlns:a="http://schemas.openxmlformats.org/drawingml/2006/main"/>
-          <a:p xmlns:a="http://schemas.openxmlformats.org/drawingml/2006/main">
-            <a:r>
-              <a:rPr lang="en-US" sz="1650" b="1">
+          <p:cNvPr id="10" name="timeline-node-0"/>
+          <p:cNvSpPr/>
+          <p:nvPr/>
+        </p:nvSpPr>
+        <p:spPr>
+          <a:xfrm xmlns:a="http://schemas.openxmlformats.org/drawingml/2006/main">
+            <a:off x="1066800" y="4610100"/>
+            <a:ext cx="304800" cy="304800"/>
+          </a:xfrm>
+          <a:prstGeom xmlns:a="http://schemas.openxmlformats.org/drawingml/2006/main" prst="ellipse">
+            <a:avLst/>
+          </a:prstGeom>
+          <a:solidFill xmlns:a="http://schemas.openxmlformats.org/drawingml/2006/main">
+            <a:srgbClr val="FBFCFA"/>
+          </a:solidFill>
+          <a:ln xmlns:a="http://schemas.openxmlformats.org/drawingml/2006/main" w="25400">
+            <a:solidFill>
+              <a:srgbClr val="17352F"/>
+            </a:solidFill>
+            <a:prstDash val="solid"/>
+          </a:ln>
+        </p:spPr>
+        <p:txBody>
+          <a:bodyPr xmlns:a="http://schemas.openxmlformats.org/drawingml/2006/main" wrap="square" lIns="0" tIns="0" rIns="0" bIns="0" anchor="t"/>
+          <a:lstStyle xmlns:a="http://schemas.openxmlformats.org/drawingml/2006/main"/>
+          <a:p xmlns:a="http://schemas.openxmlformats.org/drawingml/2006/main">
+            <a:r>
+              <a:rPr lang="en-US"/>
+              <a:t/>
+            </a:r>
+            <a:endParaRPr lang="en-US"/>
+          </a:p>
+        </p:txBody>
+      </p:sp>
+      <p:sp>
+        <p:nvSpPr>
+          <p:cNvPr id="11" name="timeline-number-0"/>
+          <p:cNvSpPr txBox="1"/>
+          <p:nvPr/>
+        </p:nvSpPr>
+        <p:spPr>
+          <a:xfrm xmlns:a="http://schemas.openxmlformats.org/drawingml/2006/main">
+            <a:off x="952500" y="4076700"/>
+            <a:ext cx="533400" cy="190500"/>
+          </a:xfrm>
+          <a:prstGeom xmlns:a="http://schemas.openxmlformats.org/drawingml/2006/main" prst="rect">
+            <a:avLst/>
+          </a:prstGeom>
+          <a:noFill xmlns:a="http://schemas.openxmlformats.org/drawingml/2006/main"/>
+          <a:ln xmlns:a="http://schemas.openxmlformats.org/drawingml/2006/main" w="0">
+            <a:noFill/>
+          </a:ln>
+        </p:spPr>
+        <p:txBody>
+          <a:bodyPr xmlns:a="http://schemas.openxmlformats.org/drawingml/2006/main" wrap="square" lIns="0" tIns="0" rIns="0" bIns="0" anchor="t"/>
+          <a:lstStyle xmlns:a="http://schemas.openxmlformats.org/drawingml/2006/main"/>
+          <a:p xmlns:a="http://schemas.openxmlformats.org/drawingml/2006/main">
+            <a:pPr algn="ctr"/>
+            <a:r>
+              <a:rPr lang="en-US" sz="975" b="1">
+                <a:solidFill>
+                  <a:srgbClr val="188A78"/>
+                </a:solidFill>
+                <a:latin typeface="Inter"/>
+                <a:ea typeface="Inter"/>
+              </a:rPr>
+              <a:t>01</a:t>
+            </a:r>
+            <a:endParaRPr lang="en-US"/>
+          </a:p>
+        </p:txBody>
+      </p:sp>
+      <p:sp>
+        <p:nvSpPr>
+          <p:cNvPr id="12" name="timeline-label-0"/>
+          <p:cNvSpPr txBox="1"/>
+          <p:nvPr/>
+        </p:nvSpPr>
+        <p:spPr>
+          <a:xfrm xmlns:a="http://schemas.openxmlformats.org/drawingml/2006/main">
+            <a:off x="533400" y="5086350"/>
+            <a:ext cx="1371600" cy="228600"/>
+          </a:xfrm>
+          <a:prstGeom xmlns:a="http://schemas.openxmlformats.org/drawingml/2006/main" prst="rect">
+            <a:avLst/>
+          </a:prstGeom>
+          <a:noFill xmlns:a="http://schemas.openxmlformats.org/drawingml/2006/main"/>
+          <a:ln xmlns:a="http://schemas.openxmlformats.org/drawingml/2006/main" w="0">
+            <a:noFill/>
+          </a:ln>
+        </p:spPr>
+        <p:txBody>
+          <a:bodyPr xmlns:a="http://schemas.openxmlformats.org/drawingml/2006/main" wrap="square" lIns="0" tIns="0" rIns="0" bIns="0" anchor="t"/>
+          <a:lstStyle xmlns:a="http://schemas.openxmlformats.org/drawingml/2006/main"/>
+          <a:p xmlns:a="http://schemas.openxmlformats.org/drawingml/2006/main">
+            <a:pPr algn="ctr"/>
+            <a:r>
+              <a:rPr lang="en-US" sz="1350" b="1">
                 <a:solidFill>
                   <a:srgbClr val="17352F"/>
                 </a:solidFill>
                 <a:latin typeface="Inter"/>
                 <a:ea typeface="Inter"/>
               </a:rPr>
-              <a:t>The observed lift is compatible with the registered mechanism, not proof of generalization.</a:t>
-            </a:r>
-            <a:endParaRPr lang="en-US"/>
-          </a:p>
-        </p:txBody>
-      </p:sp>
-      <p:sp>
-        <p:nvSpPr>
-          <p:cNvPr id="13" name="evidence-band"/>
+              <a:t>Frame</a:t>
+            </a:r>
+            <a:endParaRPr lang="en-US"/>
+          </a:p>
+        </p:txBody>
+      </p:sp>
+      <p:sp>
+        <p:nvSpPr>
+          <p:cNvPr id="13" name="timeline-text-0"/>
+          <p:cNvSpPr txBox="1"/>
+          <p:nvPr/>
+        </p:nvSpPr>
+        <p:spPr>
+          <a:xfrm xmlns:a="http://schemas.openxmlformats.org/drawingml/2006/main">
+            <a:off x="323850" y="5391150"/>
+            <a:ext cx="1790700" cy="361950"/>
+          </a:xfrm>
+          <a:prstGeom xmlns:a="http://schemas.openxmlformats.org/drawingml/2006/main" prst="rect">
+            <a:avLst/>
+          </a:prstGeom>
+          <a:noFill xmlns:a="http://schemas.openxmlformats.org/drawingml/2006/main"/>
+          <a:ln xmlns:a="http://schemas.openxmlformats.org/drawingml/2006/main" w="0">
+            <a:noFill/>
+          </a:ln>
+        </p:spPr>
+        <p:txBody>
+          <a:bodyPr xmlns:a="http://schemas.openxmlformats.org/drawingml/2006/main" wrap="square" lIns="0" tIns="0" rIns="0" bIns="0" anchor="t"/>
+          <a:lstStyle xmlns:a="http://schemas.openxmlformats.org/drawingml/2006/main"/>
+          <a:p xmlns:a="http://schemas.openxmlformats.org/drawingml/2006/main">
+            <a:pPr algn="ctr"/>
+            <a:r>
+              <a:rPr lang="en-US" sz="1050">
+                <a:solidFill>
+                  <a:srgbClr val="8E9C99"/>
+                </a:solidFill>
+                <a:latin typeface="Inter"/>
+                <a:ea typeface="Inter"/>
+              </a:rPr>
+              <a:t>Name the question</a:t>
+            </a:r>
+            <a:endParaRPr lang="en-US"/>
+          </a:p>
+        </p:txBody>
+      </p:sp>
+      <p:sp>
+        <p:nvSpPr>
+          <p:cNvPr id="14" name="timeline-node-1"/>
+          <p:cNvSpPr/>
+          <p:nvPr/>
+        </p:nvSpPr>
+        <p:spPr>
+          <a:xfrm xmlns:a="http://schemas.openxmlformats.org/drawingml/2006/main">
+            <a:off x="3638550" y="4610100"/>
+            <a:ext cx="304800" cy="304800"/>
+          </a:xfrm>
+          <a:prstGeom xmlns:a="http://schemas.openxmlformats.org/drawingml/2006/main" prst="ellipse">
+            <a:avLst/>
+          </a:prstGeom>
+          <a:solidFill xmlns:a="http://schemas.openxmlformats.org/drawingml/2006/main">
+            <a:srgbClr val="FBFCFA"/>
+          </a:solidFill>
+          <a:ln xmlns:a="http://schemas.openxmlformats.org/drawingml/2006/main" w="25400">
+            <a:solidFill>
+              <a:srgbClr val="17352F"/>
+            </a:solidFill>
+            <a:prstDash val="solid"/>
+          </a:ln>
+        </p:spPr>
+        <p:txBody>
+          <a:bodyPr xmlns:a="http://schemas.openxmlformats.org/drawingml/2006/main" wrap="square" lIns="0" tIns="0" rIns="0" bIns="0" anchor="t"/>
+          <a:lstStyle xmlns:a="http://schemas.openxmlformats.org/drawingml/2006/main"/>
+          <a:p xmlns:a="http://schemas.openxmlformats.org/drawingml/2006/main">
+            <a:r>
+              <a:rPr lang="en-US"/>
+              <a:t/>
+            </a:r>
+            <a:endParaRPr lang="en-US"/>
+          </a:p>
+        </p:txBody>
+      </p:sp>
+      <p:sp>
+        <p:nvSpPr>
+          <p:cNvPr id="15" name="timeline-number-1"/>
+          <p:cNvSpPr txBox="1"/>
+          <p:nvPr/>
+        </p:nvSpPr>
+        <p:spPr>
+          <a:xfrm xmlns:a="http://schemas.openxmlformats.org/drawingml/2006/main">
+            <a:off x="3524250" y="4076700"/>
+            <a:ext cx="533400" cy="190500"/>
+          </a:xfrm>
+          <a:prstGeom xmlns:a="http://schemas.openxmlformats.org/drawingml/2006/main" prst="rect">
+            <a:avLst/>
+          </a:prstGeom>
+          <a:noFill xmlns:a="http://schemas.openxmlformats.org/drawingml/2006/main"/>
+          <a:ln xmlns:a="http://schemas.openxmlformats.org/drawingml/2006/main" w="0">
+            <a:noFill/>
+          </a:ln>
+        </p:spPr>
+        <p:txBody>
+          <a:bodyPr xmlns:a="http://schemas.openxmlformats.org/drawingml/2006/main" wrap="square" lIns="0" tIns="0" rIns="0" bIns="0" anchor="t"/>
+          <a:lstStyle xmlns:a="http://schemas.openxmlformats.org/drawingml/2006/main"/>
+          <a:p xmlns:a="http://schemas.openxmlformats.org/drawingml/2006/main">
+            <a:pPr algn="ctr"/>
+            <a:r>
+              <a:rPr lang="en-US" sz="975" b="1">
+                <a:solidFill>
+                  <a:srgbClr val="188A78"/>
+                </a:solidFill>
+                <a:latin typeface="Inter"/>
+                <a:ea typeface="Inter"/>
+              </a:rPr>
+              <a:t>02</a:t>
+            </a:r>
+            <a:endParaRPr lang="en-US"/>
+          </a:p>
+        </p:txBody>
+      </p:sp>
+      <p:sp>
+        <p:nvSpPr>
+          <p:cNvPr id="16" name="timeline-label-1"/>
+          <p:cNvSpPr txBox="1"/>
+          <p:nvPr/>
+        </p:nvSpPr>
+        <p:spPr>
+          <a:xfrm xmlns:a="http://schemas.openxmlformats.org/drawingml/2006/main">
+            <a:off x="3105150" y="5086350"/>
+            <a:ext cx="1371600" cy="228600"/>
+          </a:xfrm>
+          <a:prstGeom xmlns:a="http://schemas.openxmlformats.org/drawingml/2006/main" prst="rect">
+            <a:avLst/>
+          </a:prstGeom>
+          <a:noFill xmlns:a="http://schemas.openxmlformats.org/drawingml/2006/main"/>
+          <a:ln xmlns:a="http://schemas.openxmlformats.org/drawingml/2006/main" w="0">
+            <a:noFill/>
+          </a:ln>
+        </p:spPr>
+        <p:txBody>
+          <a:bodyPr xmlns:a="http://schemas.openxmlformats.org/drawingml/2006/main" wrap="square" lIns="0" tIns="0" rIns="0" bIns="0" anchor="t"/>
+          <a:lstStyle xmlns:a="http://schemas.openxmlformats.org/drawingml/2006/main"/>
+          <a:p xmlns:a="http://schemas.openxmlformats.org/drawingml/2006/main">
+            <a:pPr algn="ctr"/>
+            <a:r>
+              <a:rPr lang="en-US" sz="1350" b="1">
+                <a:solidFill>
+                  <a:srgbClr val="17352F"/>
+                </a:solidFill>
+                <a:latin typeface="Inter"/>
+                <a:ea typeface="Inter"/>
+              </a:rPr>
+              <a:t>Test</a:t>
+            </a:r>
+            <a:endParaRPr lang="en-US"/>
+          </a:p>
+        </p:txBody>
+      </p:sp>
+      <p:sp>
+        <p:nvSpPr>
+          <p:cNvPr id="17" name="timeline-text-1"/>
+          <p:cNvSpPr txBox="1"/>
+          <p:nvPr/>
+        </p:nvSpPr>
+        <p:spPr>
+          <a:xfrm xmlns:a="http://schemas.openxmlformats.org/drawingml/2006/main">
+            <a:off x="2895600" y="5391150"/>
+            <a:ext cx="1790700" cy="361950"/>
+          </a:xfrm>
+          <a:prstGeom xmlns:a="http://schemas.openxmlformats.org/drawingml/2006/main" prst="rect">
+            <a:avLst/>
+          </a:prstGeom>
+          <a:noFill xmlns:a="http://schemas.openxmlformats.org/drawingml/2006/main"/>
+          <a:ln xmlns:a="http://schemas.openxmlformats.org/drawingml/2006/main" w="0">
+            <a:noFill/>
+          </a:ln>
+        </p:spPr>
+        <p:txBody>
+          <a:bodyPr xmlns:a="http://schemas.openxmlformats.org/drawingml/2006/main" wrap="square" lIns="0" tIns="0" rIns="0" bIns="0" anchor="t"/>
+          <a:lstStyle xmlns:a="http://schemas.openxmlformats.org/drawingml/2006/main"/>
+          <a:p xmlns:a="http://schemas.openxmlformats.org/drawingml/2006/main">
+            <a:pPr algn="ctr"/>
+            <a:r>
+              <a:rPr lang="en-US" sz="1050">
+                <a:solidFill>
+                  <a:srgbClr val="8E9C99"/>
+                </a:solidFill>
+                <a:latin typeface="Inter"/>
+                <a:ea typeface="Inter"/>
+              </a:rPr>
+              <a:t>Hold the rule</a:t>
+            </a:r>
+            <a:endParaRPr lang="en-US"/>
+          </a:p>
+        </p:txBody>
+      </p:sp>
+      <p:sp>
+        <p:nvSpPr>
+          <p:cNvPr id="18" name="timeline-node-2"/>
+          <p:cNvSpPr/>
+          <p:nvPr/>
+        </p:nvSpPr>
+        <p:spPr>
+          <a:xfrm xmlns:a="http://schemas.openxmlformats.org/drawingml/2006/main">
+            <a:off x="6210300" y="4610100"/>
+            <a:ext cx="304800" cy="304800"/>
+          </a:xfrm>
+          <a:prstGeom xmlns:a="http://schemas.openxmlformats.org/drawingml/2006/main" prst="ellipse">
+            <a:avLst/>
+          </a:prstGeom>
+          <a:solidFill xmlns:a="http://schemas.openxmlformats.org/drawingml/2006/main">
+            <a:srgbClr val="FBFCFA"/>
+          </a:solidFill>
+          <a:ln xmlns:a="http://schemas.openxmlformats.org/drawingml/2006/main" w="25400">
+            <a:solidFill>
+              <a:srgbClr val="17352F"/>
+            </a:solidFill>
+            <a:prstDash val="solid"/>
+          </a:ln>
+        </p:spPr>
+        <p:txBody>
+          <a:bodyPr xmlns:a="http://schemas.openxmlformats.org/drawingml/2006/main" wrap="square" lIns="0" tIns="0" rIns="0" bIns="0" anchor="t"/>
+          <a:lstStyle xmlns:a="http://schemas.openxmlformats.org/drawingml/2006/main"/>
+          <a:p xmlns:a="http://schemas.openxmlformats.org/drawingml/2006/main">
+            <a:r>
+              <a:rPr lang="en-US"/>
+              <a:t/>
+            </a:r>
+            <a:endParaRPr lang="en-US"/>
+          </a:p>
+        </p:txBody>
+      </p:sp>
+      <p:sp>
+        <p:nvSpPr>
+          <p:cNvPr id="19" name="timeline-number-2"/>
+          <p:cNvSpPr txBox="1"/>
+          <p:nvPr/>
+        </p:nvSpPr>
+        <p:spPr>
+          <a:xfrm xmlns:a="http://schemas.openxmlformats.org/drawingml/2006/main">
+            <a:off x="6096000" y="4076700"/>
+            <a:ext cx="533400" cy="190500"/>
+          </a:xfrm>
+          <a:prstGeom xmlns:a="http://schemas.openxmlformats.org/drawingml/2006/main" prst="rect">
+            <a:avLst/>
+          </a:prstGeom>
+          <a:noFill xmlns:a="http://schemas.openxmlformats.org/drawingml/2006/main"/>
+          <a:ln xmlns:a="http://schemas.openxmlformats.org/drawingml/2006/main" w="0">
+            <a:noFill/>
+          </a:ln>
+        </p:spPr>
+        <p:txBody>
+          <a:bodyPr xmlns:a="http://schemas.openxmlformats.org/drawingml/2006/main" wrap="square" lIns="0" tIns="0" rIns="0" bIns="0" anchor="t"/>
+          <a:lstStyle xmlns:a="http://schemas.openxmlformats.org/drawingml/2006/main"/>
+          <a:p xmlns:a="http://schemas.openxmlformats.org/drawingml/2006/main">
+            <a:pPr algn="ctr"/>
+            <a:r>
+              <a:rPr lang="en-US" sz="975" b="1">
+                <a:solidFill>
+                  <a:srgbClr val="188A78"/>
+                </a:solidFill>
+                <a:latin typeface="Inter"/>
+                <a:ea typeface="Inter"/>
+              </a:rPr>
+              <a:t>03</a:t>
+            </a:r>
+            <a:endParaRPr lang="en-US"/>
+          </a:p>
+        </p:txBody>
+      </p:sp>
+      <p:sp>
+        <p:nvSpPr>
+          <p:cNvPr id="20" name="timeline-label-2"/>
+          <p:cNvSpPr txBox="1"/>
+          <p:nvPr/>
+        </p:nvSpPr>
+        <p:spPr>
+          <a:xfrm xmlns:a="http://schemas.openxmlformats.org/drawingml/2006/main">
+            <a:off x="5676900" y="5086350"/>
+            <a:ext cx="1371600" cy="228600"/>
+          </a:xfrm>
+          <a:prstGeom xmlns:a="http://schemas.openxmlformats.org/drawingml/2006/main" prst="rect">
+            <a:avLst/>
+          </a:prstGeom>
+          <a:noFill xmlns:a="http://schemas.openxmlformats.org/drawingml/2006/main"/>
+          <a:ln xmlns:a="http://schemas.openxmlformats.org/drawingml/2006/main" w="0">
+            <a:noFill/>
+          </a:ln>
+        </p:spPr>
+        <p:txBody>
+          <a:bodyPr xmlns:a="http://schemas.openxmlformats.org/drawingml/2006/main" wrap="square" lIns="0" tIns="0" rIns="0" bIns="0" anchor="t"/>
+          <a:lstStyle xmlns:a="http://schemas.openxmlformats.org/drawingml/2006/main"/>
+          <a:p xmlns:a="http://schemas.openxmlformats.org/drawingml/2006/main">
+            <a:pPr algn="ctr"/>
+            <a:r>
+              <a:rPr lang="en-US" sz="1350" b="1">
+                <a:solidFill>
+                  <a:srgbClr val="17352F"/>
+                </a:solidFill>
+                <a:latin typeface="Inter"/>
+                <a:ea typeface="Inter"/>
+              </a:rPr>
+              <a:t>Read</a:t>
+            </a:r>
+            <a:endParaRPr lang="en-US"/>
+          </a:p>
+        </p:txBody>
+      </p:sp>
+      <p:sp>
+        <p:nvSpPr>
+          <p:cNvPr id="21" name="timeline-text-2"/>
+          <p:cNvSpPr txBox="1"/>
+          <p:nvPr/>
+        </p:nvSpPr>
+        <p:spPr>
+          <a:xfrm xmlns:a="http://schemas.openxmlformats.org/drawingml/2006/main">
+            <a:off x="5467350" y="5391150"/>
+            <a:ext cx="1790700" cy="361950"/>
+          </a:xfrm>
+          <a:prstGeom xmlns:a="http://schemas.openxmlformats.org/drawingml/2006/main" prst="rect">
+            <a:avLst/>
+          </a:prstGeom>
+          <a:noFill xmlns:a="http://schemas.openxmlformats.org/drawingml/2006/main"/>
+          <a:ln xmlns:a="http://schemas.openxmlformats.org/drawingml/2006/main" w="0">
+            <a:noFill/>
+          </a:ln>
+        </p:spPr>
+        <p:txBody>
+          <a:bodyPr xmlns:a="http://schemas.openxmlformats.org/drawingml/2006/main" wrap="square" lIns="0" tIns="0" rIns="0" bIns="0" anchor="t"/>
+          <a:lstStyle xmlns:a="http://schemas.openxmlformats.org/drawingml/2006/main"/>
+          <a:p xmlns:a="http://schemas.openxmlformats.org/drawingml/2006/main">
+            <a:pPr algn="ctr"/>
+            <a:r>
+              <a:rPr lang="en-US" sz="1050">
+                <a:solidFill>
+                  <a:srgbClr val="8E9C99"/>
+                </a:solidFill>
+                <a:latin typeface="Inter"/>
+                <a:ea typeface="Inter"/>
+              </a:rPr>
+              <a:t>Separate signal</a:t>
+            </a:r>
+            <a:endParaRPr lang="en-US"/>
+          </a:p>
+        </p:txBody>
+      </p:sp>
+      <p:sp>
+        <p:nvSpPr>
+          <p:cNvPr id="22" name="timeline-node-3"/>
+          <p:cNvSpPr/>
+          <p:nvPr/>
+        </p:nvSpPr>
+        <p:spPr>
+          <a:xfrm xmlns:a="http://schemas.openxmlformats.org/drawingml/2006/main">
+            <a:off x="8782050" y="4610100"/>
+            <a:ext cx="304800" cy="304800"/>
+          </a:xfrm>
+          <a:prstGeom xmlns:a="http://schemas.openxmlformats.org/drawingml/2006/main" prst="ellipse">
+            <a:avLst/>
+          </a:prstGeom>
+          <a:solidFill xmlns:a="http://schemas.openxmlformats.org/drawingml/2006/main">
+            <a:srgbClr val="FBFCFA"/>
+          </a:solidFill>
+          <a:ln xmlns:a="http://schemas.openxmlformats.org/drawingml/2006/main" w="25400">
+            <a:solidFill>
+              <a:srgbClr val="17352F"/>
+            </a:solidFill>
+            <a:prstDash val="solid"/>
+          </a:ln>
+        </p:spPr>
+        <p:txBody>
+          <a:bodyPr xmlns:a="http://schemas.openxmlformats.org/drawingml/2006/main" wrap="square" lIns="0" tIns="0" rIns="0" bIns="0" anchor="t"/>
+          <a:lstStyle xmlns:a="http://schemas.openxmlformats.org/drawingml/2006/main"/>
+          <a:p xmlns:a="http://schemas.openxmlformats.org/drawingml/2006/main">
+            <a:r>
+              <a:rPr lang="en-US"/>
+              <a:t/>
+            </a:r>
+            <a:endParaRPr lang="en-US"/>
+          </a:p>
+        </p:txBody>
+      </p:sp>
+      <p:sp>
+        <p:nvSpPr>
+          <p:cNvPr id="23" name="timeline-number-3"/>
+          <p:cNvSpPr txBox="1"/>
+          <p:nvPr/>
+        </p:nvSpPr>
+        <p:spPr>
+          <a:xfrm xmlns:a="http://schemas.openxmlformats.org/drawingml/2006/main">
+            <a:off x="8667750" y="4076700"/>
+            <a:ext cx="533400" cy="190500"/>
+          </a:xfrm>
+          <a:prstGeom xmlns:a="http://schemas.openxmlformats.org/drawingml/2006/main" prst="rect">
+            <a:avLst/>
+          </a:prstGeom>
+          <a:noFill xmlns:a="http://schemas.openxmlformats.org/drawingml/2006/main"/>
+          <a:ln xmlns:a="http://schemas.openxmlformats.org/drawingml/2006/main" w="0">
+            <a:noFill/>
+          </a:ln>
+        </p:spPr>
+        <p:txBody>
+          <a:bodyPr xmlns:a="http://schemas.openxmlformats.org/drawingml/2006/main" wrap="square" lIns="0" tIns="0" rIns="0" bIns="0" anchor="t"/>
+          <a:lstStyle xmlns:a="http://schemas.openxmlformats.org/drawingml/2006/main"/>
+          <a:p xmlns:a="http://schemas.openxmlformats.org/drawingml/2006/main">
+            <a:pPr algn="ctr"/>
+            <a:r>
+              <a:rPr lang="en-US" sz="975" b="1">
+                <a:solidFill>
+                  <a:srgbClr val="188A78"/>
+                </a:solidFill>
+                <a:latin typeface="Inter"/>
+                <a:ea typeface="Inter"/>
+              </a:rPr>
+              <a:t>04</a:t>
+            </a:r>
+            <a:endParaRPr lang="en-US"/>
+          </a:p>
+        </p:txBody>
+      </p:sp>
+      <p:sp>
+        <p:nvSpPr>
+          <p:cNvPr id="24" name="timeline-label-3"/>
+          <p:cNvSpPr txBox="1"/>
+          <p:nvPr/>
+        </p:nvSpPr>
+        <p:spPr>
+          <a:xfrm xmlns:a="http://schemas.openxmlformats.org/drawingml/2006/main">
+            <a:off x="8248650" y="5086350"/>
+            <a:ext cx="1371600" cy="228600"/>
+          </a:xfrm>
+          <a:prstGeom xmlns:a="http://schemas.openxmlformats.org/drawingml/2006/main" prst="rect">
+            <a:avLst/>
+          </a:prstGeom>
+          <a:noFill xmlns:a="http://schemas.openxmlformats.org/drawingml/2006/main"/>
+          <a:ln xmlns:a="http://schemas.openxmlformats.org/drawingml/2006/main" w="0">
+            <a:noFill/>
+          </a:ln>
+        </p:spPr>
+        <p:txBody>
+          <a:bodyPr xmlns:a="http://schemas.openxmlformats.org/drawingml/2006/main" wrap="square" lIns="0" tIns="0" rIns="0" bIns="0" anchor="t"/>
+          <a:lstStyle xmlns:a="http://schemas.openxmlformats.org/drawingml/2006/main"/>
+          <a:p xmlns:a="http://schemas.openxmlformats.org/drawingml/2006/main">
+            <a:pPr algn="ctr"/>
+            <a:r>
+              <a:rPr lang="en-US" sz="1350" b="1">
+                <a:solidFill>
+                  <a:srgbClr val="17352F"/>
+                </a:solidFill>
+                <a:latin typeface="Inter"/>
+                <a:ea typeface="Inter"/>
+              </a:rPr>
+              <a:t>Move</a:t>
+            </a:r>
+            <a:endParaRPr lang="en-US"/>
+          </a:p>
+        </p:txBody>
+      </p:sp>
+      <p:sp>
+        <p:nvSpPr>
+          <p:cNvPr id="25" name="timeline-text-3"/>
+          <p:cNvSpPr txBox="1"/>
+          <p:nvPr/>
+        </p:nvSpPr>
+        <p:spPr>
+          <a:xfrm xmlns:a="http://schemas.openxmlformats.org/drawingml/2006/main">
+            <a:off x="8039100" y="5391150"/>
+            <a:ext cx="1790700" cy="361950"/>
+          </a:xfrm>
+          <a:prstGeom xmlns:a="http://schemas.openxmlformats.org/drawingml/2006/main" prst="rect">
+            <a:avLst/>
+          </a:prstGeom>
+          <a:noFill xmlns:a="http://schemas.openxmlformats.org/drawingml/2006/main"/>
+          <a:ln xmlns:a="http://schemas.openxmlformats.org/drawingml/2006/main" w="0">
+            <a:noFill/>
+          </a:ln>
+        </p:spPr>
+        <p:txBody>
+          <a:bodyPr xmlns:a="http://schemas.openxmlformats.org/drawingml/2006/main" wrap="square" lIns="0" tIns="0" rIns="0" bIns="0" anchor="t"/>
+          <a:lstStyle xmlns:a="http://schemas.openxmlformats.org/drawingml/2006/main"/>
+          <a:p xmlns:a="http://schemas.openxmlformats.org/drawingml/2006/main">
+            <a:pPr algn="ctr"/>
+            <a:r>
+              <a:rPr lang="en-US" sz="1050">
+                <a:solidFill>
+                  <a:srgbClr val="8E9C99"/>
+                </a:solidFill>
+                <a:latin typeface="Inter"/>
+                <a:ea typeface="Inter"/>
+              </a:rPr>
+              <a:t>Set the next gate</a:t>
+            </a:r>
+            <a:endParaRPr lang="en-US"/>
+          </a:p>
+        </p:txBody>
+      </p:sp>
+      <p:sp>
+        <p:nvSpPr>
+          <p:cNvPr id="26" name="timeline-node-4"/>
+          <p:cNvSpPr/>
+          <p:nvPr/>
+        </p:nvSpPr>
+        <p:spPr>
+          <a:xfrm xmlns:a="http://schemas.openxmlformats.org/drawingml/2006/main">
+            <a:off x="11353800" y="4610100"/>
+            <a:ext cx="304800" cy="304800"/>
+          </a:xfrm>
+          <a:prstGeom xmlns:a="http://schemas.openxmlformats.org/drawingml/2006/main" prst="ellipse">
+            <a:avLst/>
+          </a:prstGeom>
+          <a:solidFill xmlns:a="http://schemas.openxmlformats.org/drawingml/2006/main">
+            <a:srgbClr val="188A78"/>
+          </a:solidFill>
+          <a:ln xmlns:a="http://schemas.openxmlformats.org/drawingml/2006/main" w="25400">
+            <a:solidFill>
+              <a:srgbClr val="188A78"/>
+            </a:solidFill>
+            <a:prstDash val="solid"/>
+          </a:ln>
+        </p:spPr>
+        <p:txBody>
+          <a:bodyPr xmlns:a="http://schemas.openxmlformats.org/drawingml/2006/main" wrap="square" lIns="0" tIns="0" rIns="0" bIns="0" anchor="t"/>
+          <a:lstStyle xmlns:a="http://schemas.openxmlformats.org/drawingml/2006/main"/>
+          <a:p xmlns:a="http://schemas.openxmlformats.org/drawingml/2006/main">
+            <a:r>
+              <a:rPr lang="en-US"/>
+              <a:t/>
+            </a:r>
+            <a:endParaRPr lang="en-US"/>
+          </a:p>
+        </p:txBody>
+      </p:sp>
+      <p:sp>
+        <p:nvSpPr>
+          <p:cNvPr id="27" name="timeline-number-4"/>
+          <p:cNvSpPr txBox="1"/>
+          <p:nvPr/>
+        </p:nvSpPr>
+        <p:spPr>
+          <a:xfrm xmlns:a="http://schemas.openxmlformats.org/drawingml/2006/main">
+            <a:off x="11239500" y="4076700"/>
+            <a:ext cx="533400" cy="190500"/>
+          </a:xfrm>
+          <a:prstGeom xmlns:a="http://schemas.openxmlformats.org/drawingml/2006/main" prst="rect">
+            <a:avLst/>
+          </a:prstGeom>
+          <a:noFill xmlns:a="http://schemas.openxmlformats.org/drawingml/2006/main"/>
+          <a:ln xmlns:a="http://schemas.openxmlformats.org/drawingml/2006/main" w="0">
+            <a:noFill/>
+          </a:ln>
+        </p:spPr>
+        <p:txBody>
+          <a:bodyPr xmlns:a="http://schemas.openxmlformats.org/drawingml/2006/main" wrap="square" lIns="0" tIns="0" rIns="0" bIns="0" anchor="t"/>
+          <a:lstStyle xmlns:a="http://schemas.openxmlformats.org/drawingml/2006/main"/>
+          <a:p xmlns:a="http://schemas.openxmlformats.org/drawingml/2006/main">
+            <a:pPr algn="ctr"/>
+            <a:r>
+              <a:rPr lang="en-US" sz="975" b="1">
+                <a:solidFill>
+                  <a:srgbClr val="188A78"/>
+                </a:solidFill>
+                <a:latin typeface="Inter"/>
+                <a:ea typeface="Inter"/>
+              </a:rPr>
+              <a:t>05</a:t>
+            </a:r>
+            <a:endParaRPr lang="en-US"/>
+          </a:p>
+        </p:txBody>
+      </p:sp>
+      <p:sp>
+        <p:nvSpPr>
+          <p:cNvPr id="28" name="timeline-label-4"/>
+          <p:cNvSpPr txBox="1"/>
+          <p:nvPr/>
+        </p:nvSpPr>
+        <p:spPr>
+          <a:xfrm xmlns:a="http://schemas.openxmlformats.org/drawingml/2006/main">
+            <a:off x="10820400" y="5086350"/>
+            <a:ext cx="1371600" cy="228600"/>
+          </a:xfrm>
+          <a:prstGeom xmlns:a="http://schemas.openxmlformats.org/drawingml/2006/main" prst="rect">
+            <a:avLst/>
+          </a:prstGeom>
+          <a:noFill xmlns:a="http://schemas.openxmlformats.org/drawingml/2006/main"/>
+          <a:ln xmlns:a="http://schemas.openxmlformats.org/drawingml/2006/main" w="0">
+            <a:noFill/>
+          </a:ln>
+        </p:spPr>
+        <p:txBody>
+          <a:bodyPr xmlns:a="http://schemas.openxmlformats.org/drawingml/2006/main" wrap="square" lIns="0" tIns="0" rIns="0" bIns="0" anchor="t"/>
+          <a:lstStyle xmlns:a="http://schemas.openxmlformats.org/drawingml/2006/main"/>
+          <a:p xmlns:a="http://schemas.openxmlformats.org/drawingml/2006/main">
+            <a:pPr algn="ctr"/>
+            <a:r>
+              <a:rPr lang="en-US" sz="1350" b="1">
+                <a:solidFill>
+                  <a:srgbClr val="17352F"/>
+                </a:solidFill>
+                <a:latin typeface="Inter"/>
+                <a:ea typeface="Inter"/>
+              </a:rPr>
+              <a:t>Scale</a:t>
+            </a:r>
+            <a:endParaRPr lang="en-US"/>
+          </a:p>
+        </p:txBody>
+      </p:sp>
+      <p:sp>
+        <p:nvSpPr>
+          <p:cNvPr id="29" name="timeline-text-4"/>
+          <p:cNvSpPr txBox="1"/>
+          <p:nvPr/>
+        </p:nvSpPr>
+        <p:spPr>
+          <a:xfrm xmlns:a="http://schemas.openxmlformats.org/drawingml/2006/main">
+            <a:off x="10610850" y="5391150"/>
+            <a:ext cx="1790700" cy="361950"/>
+          </a:xfrm>
+          <a:prstGeom xmlns:a="http://schemas.openxmlformats.org/drawingml/2006/main" prst="rect">
+            <a:avLst/>
+          </a:prstGeom>
+          <a:noFill xmlns:a="http://schemas.openxmlformats.org/drawingml/2006/main"/>
+          <a:ln xmlns:a="http://schemas.openxmlformats.org/drawingml/2006/main" w="0">
+            <a:noFill/>
+          </a:ln>
+        </p:spPr>
+        <p:txBody>
+          <a:bodyPr xmlns:a="http://schemas.openxmlformats.org/drawingml/2006/main" wrap="square" lIns="0" tIns="0" rIns="0" bIns="0" anchor="t"/>
+          <a:lstStyle xmlns:a="http://schemas.openxmlformats.org/drawingml/2006/main"/>
+          <a:p xmlns:a="http://schemas.openxmlformats.org/drawingml/2006/main">
+            <a:pPr algn="ctr"/>
+            <a:r>
+              <a:rPr lang="en-US" sz="1050">
+                <a:solidFill>
+                  <a:srgbClr val="8E9C99"/>
+                </a:solidFill>
+                <a:latin typeface="Inter"/>
+                <a:ea typeface="Inter"/>
+              </a:rPr>
+              <a:t>Repeat what held</a:t>
+            </a:r>
+            <a:endParaRPr lang="en-US"/>
+          </a:p>
+        </p:txBody>
+      </p:sp>
+      <p:sp>
+        <p:nvSpPr>
+          <p:cNvPr id="30" name="timeline-read-label"/>
+          <p:cNvSpPr txBox="1"/>
+          <p:nvPr/>
+        </p:nvSpPr>
+        <p:spPr>
+          <a:xfrm xmlns:a="http://schemas.openxmlformats.org/drawingml/2006/main">
+            <a:off x="1066800" y="6667500"/>
+            <a:ext cx="2286000" cy="209550"/>
+          </a:xfrm>
+          <a:prstGeom xmlns:a="http://schemas.openxmlformats.org/drawingml/2006/main" prst="rect">
+            <a:avLst/>
+          </a:prstGeom>
+          <a:noFill xmlns:a="http://schemas.openxmlformats.org/drawingml/2006/main"/>
+          <a:ln xmlns:a="http://schemas.openxmlformats.org/drawingml/2006/main" w="0">
+            <a:noFill/>
+          </a:ln>
+        </p:spPr>
+        <p:txBody>
+          <a:bodyPr xmlns:a="http://schemas.openxmlformats.org/drawingml/2006/main" wrap="square" lIns="0" tIns="0" rIns="0" bIns="0" anchor="t"/>
+          <a:lstStyle xmlns:a="http://schemas.openxmlformats.org/drawingml/2006/main"/>
+          <a:p xmlns:a="http://schemas.openxmlformats.org/drawingml/2006/main">
+            <a:r>
+              <a:rPr lang="en-US" sz="1050" b="1">
+                <a:solidFill>
+                  <a:srgbClr val="188A78"/>
+                </a:solidFill>
+                <a:latin typeface="Inter"/>
+                <a:ea typeface="Inter"/>
+              </a:rPr>
+              <a:t>READ-THROUGH</a:t>
+            </a:r>
+            <a:endParaRPr lang="en-US"/>
+          </a:p>
+        </p:txBody>
+      </p:sp>
+      <p:sp>
+        <p:nvSpPr>
+          <p:cNvPr id="31" name="timeline-read"/>
+          <p:cNvSpPr txBox="1"/>
+          <p:nvPr/>
+        </p:nvSpPr>
+        <p:spPr>
+          <a:xfrm xmlns:a="http://schemas.openxmlformats.org/drawingml/2006/main">
+            <a:off x="3333750" y="6629400"/>
+            <a:ext cx="8191500" cy="266700"/>
+          </a:xfrm>
+          <a:prstGeom xmlns:a="http://schemas.openxmlformats.org/drawingml/2006/main" prst="rect">
+            <a:avLst/>
+          </a:prstGeom>
+          <a:noFill xmlns:a="http://schemas.openxmlformats.org/drawingml/2006/main"/>
+          <a:ln xmlns:a="http://schemas.openxmlformats.org/drawingml/2006/main" w="0">
+            <a:noFill/>
+          </a:ln>
+        </p:spPr>
+        <p:txBody>
+          <a:bodyPr xmlns:a="http://schemas.openxmlformats.org/drawingml/2006/main" wrap="square" lIns="0" tIns="0" rIns="0" bIns="0" anchor="t"/>
+          <a:lstStyle xmlns:a="http://schemas.openxmlformats.org/drawingml/2006/main"/>
+          <a:p xmlns:a="http://schemas.openxmlformats.org/drawingml/2006/main">
+            <a:r>
+              <a:rPr lang="en-US" sz="1425" b="1">
+                <a:solidFill>
+                  <a:srgbClr val="17352F"/>
+                </a:solidFill>
+                <a:latin typeface="Inter"/>
+                <a:ea typeface="Inter"/>
+              </a:rPr>
+              <a:t>A sequence is useful when each handoff changes what can happen next.</a:t>
+            </a:r>
+            <a:endParaRPr lang="en-US"/>
+          </a:p>
+        </p:txBody>
+      </p:sp>
+      <p:sp>
+        <p:nvSpPr>
+          <p:cNvPr id="32" name="evidence-band"/>
           <p:cNvSpPr/>
           <p:nvPr/>
         </p:nvSpPr>
@@ -2483,7 +3039,7 @@
       </p:sp>
       <p:sp>
         <p:nvSpPr>
-          <p:cNvPr id="14" name="evidence-band-text"/>
+          <p:cNvPr id="33" name="evidence-band-text"/>
           <p:cNvSpPr txBox="1"/>
           <p:nvPr/>
         </p:nvSpPr>
@@ -2520,7 +3076,7 @@
       </p:sp>
       <p:sp>
         <p:nvSpPr>
-          <p:cNvPr id="15" name="source"/>
+          <p:cNvPr id="34" name="source"/>
           <p:cNvSpPr txBox="1"/>
           <p:nvPr/>
         </p:nvSpPr>
@@ -2557,7 +3113,7 @@
       </p:sp>
       <p:sp>
         <p:nvSpPr>
-          <p:cNvPr id="16" name="page-number"/>
+          <p:cNvPr id="35" name="page-number"/>
           <p:cNvSpPr txBox="1"/>
           <p:nvPr/>
         </p:nvSpPr>
